--- a/lesson4 genai/שיעור 4 - בינה מלאכותית ומשחק נים.pptx
+++ b/lesson4 genai/שיעור 4 - בינה מלאכותית ומשחק נים.pptx
@@ -12477,6 +12477,44 @@
               </a:rPr>
               <a:t>לולאה על רשימה - בדיוק כמו בשיעור הקודם!</a:t>
             </a:r>
+          </a:p>
+        </p:txBody>
+      </p:sp>
+      <p:sp>
+        <p:nvSpPr>
+          <p:cNvPr id="22" name="TextBox 21">
+            <a:extLst>
+              <a:ext uri="{FF2B5EF4-FFF2-40B4-BE49-F238E27FC236}">
+                <a16:creationId xmlns:a16="http://schemas.microsoft.com/office/drawing/2014/main" id="{D999BBED-9B47-C64B-B581-E6FAEBC9E486}"/>
+              </a:ext>
+            </a:extLst>
+          </p:cNvPr>
+          <p:cNvSpPr txBox="1"/>
+          <p:nvPr/>
+        </p:nvSpPr>
+        <p:spPr>
+          <a:xfrm>
+            <a:off x="7200856" y="6013180"/>
+            <a:ext cx="4526367" cy="369332"/>
+          </a:xfrm>
+          <a:prstGeom prst="rect">
+            <a:avLst/>
+          </a:prstGeom>
+          <a:noFill/>
+        </p:spPr>
+        <p:txBody>
+          <a:bodyPr wrap="none" rtlCol="1">
+            <a:spAutoFit/>
+          </a:bodyPr>
+          <a:lstStyle/>
+          <a:p>
+            <a:r>
+              <a:rPr lang="en-US" dirty="0">
+                <a:hlinkClick r:id="rId3"/>
+              </a:rPr>
+              <a:t>https://ai.google.dev/gemini-api/docs/models</a:t>
+            </a:r>
+            <a:endParaRPr lang="he-IL" dirty="0"/>
           </a:p>
         </p:txBody>
       </p:sp>
